--- a/docs/design/main_diagram.pptx
+++ b/docs/design/main_diagram.pptx
@@ -4203,7 +4203,7 @@
                 </a:solidFill>
                 <a:latin typeface="Liberation Sans"/>
               </a:rPr>
-              <a:t>Text Embedding</a:t>
+              <a:t>BGE [frozen]</a:t>
             </a:r>
           </a:p>
           <a:p>
@@ -4222,7 +4222,7 @@
                 </a:solidFill>
                 <a:latin typeface="Liberation Sans"/>
               </a:rPr>
-              <a:t>384</a:t>
+              <a:t>1,024</a:t>
             </a:r>
           </a:p>
         </p:txBody>
@@ -4291,13 +4291,13 @@
               </a:spcAft>
             </a:pPr>
             <a:r>
-              <a:rPr sz="2400" b="1">
+              <a:rPr sz="1800" b="1">
                 <a:solidFill>
                   <a:srgbClr val="687581"/>
                 </a:solidFill>
                 <a:latin typeface="Liberation Sans"/>
               </a:rPr>
-              <a:t>Baseline</a:t>
+              <a:t>Projection + MLP</a:t>
             </a:r>
           </a:p>
           <a:p>
@@ -4316,7 +4316,7 @@
                 </a:solidFill>
                 <a:latin typeface="Liberation Sans"/>
               </a:rPr>
-              <a:t>512</a:t>
+              <a:t>Item 512</a:t>
             </a:r>
           </a:p>
         </p:txBody>
@@ -4574,13 +4574,13 @@
               </a:spcAft>
             </a:pPr>
             <a:r>
-              <a:rPr sz="2400" b="1">
+              <a:rPr sz="2200" b="1">
                 <a:solidFill>
                   <a:srgbClr val="2C66B7"/>
                 </a:solidFill>
                 <a:latin typeface="Liberation Sans"/>
               </a:rPr>
-              <a:t>Text Embedding</a:t>
+              <a:t>BGE + Projection</a:t>
             </a:r>
           </a:p>
           <a:p>
@@ -4599,7 +4599,7 @@
                 </a:solidFill>
                 <a:latin typeface="Liberation Sans"/>
               </a:rPr>
-              <a:t>128</a:t>
+              <a:t>1,024 → 128</a:t>
             </a:r>
           </a:p>
         </p:txBody>
@@ -4743,13 +4743,13 @@
               </a:spcAft>
             </a:pPr>
             <a:r>
-              <a:rPr sz="2400" b="1">
+              <a:rPr sz="2200" b="1">
                 <a:solidFill>
                   <a:srgbClr val="2C66B7"/>
                 </a:solidFill>
                 <a:latin typeface="Liberation Sans"/>
               </a:rPr>
-              <a:t>Text Embedding</a:t>
+              <a:t>BGE + Projection</a:t>
             </a:r>
           </a:p>
           <a:p>
@@ -4768,7 +4768,7 @@
                 </a:solidFill>
                 <a:latin typeface="Liberation Sans"/>
               </a:rPr>
-              <a:t>384</a:t>
+              <a:t>1,024 → 384</a:t>
             </a:r>
           </a:p>
         </p:txBody>
@@ -4837,13 +4837,13 @@
               </a:spcAft>
             </a:pPr>
             <a:r>
-              <a:rPr sz="2400" b="1">
+              <a:rPr sz="2000" b="1">
                 <a:solidFill>
                   <a:srgbClr val="2C66B7"/>
                 </a:solidFill>
                 <a:latin typeface="Liberation Sans"/>
               </a:rPr>
-              <a:t>Fusion</a:t>
+              <a:t>Concat + MLP</a:t>
             </a:r>
           </a:p>
           <a:p>
@@ -4862,7 +4862,7 @@
                 </a:solidFill>
                 <a:latin typeface="Liberation Sans"/>
               </a:rPr>
-              <a:t>512</a:t>
+              <a:t>Item 512</a:t>
             </a:r>
           </a:p>
         </p:txBody>
@@ -5551,13 +5551,13 @@
               </a:spcAft>
             </a:pPr>
             <a:r>
-              <a:rPr sz="2400" b="1">
+              <a:rPr sz="2200" b="1">
                 <a:solidFill>
                   <a:srgbClr val="00898D"/>
                 </a:solidFill>
                 <a:latin typeface="Liberation Sans"/>
               </a:rPr>
-              <a:t>Text Embedding</a:t>
+              <a:t>BGE + Projection</a:t>
             </a:r>
           </a:p>
           <a:p>
@@ -5576,7 +5576,7 @@
                 </a:solidFill>
                 <a:latin typeface="Liberation Sans"/>
               </a:rPr>
-              <a:t>128</a:t>
+              <a:t>1,024 → 128</a:t>
             </a:r>
           </a:p>
         </p:txBody>
@@ -5745,7 +5745,7 @@
                 </a:solidFill>
                 <a:latin typeface="Liberation Sans"/>
               </a:rPr>
-              <a:t>Graph Embedding</a:t>
+              <a:t>Scene Features</a:t>
             </a:r>
           </a:p>
           <a:p>
@@ -5755,6 +5755,25 @@
               </a:spcBef>
               <a:spcAft>
                 <a:spcPts val="400"/>
+              </a:spcAft>
+            </a:pPr>
+            <a:r>
+              <a:rPr sz="1700" b="0">
+                <a:solidFill>
+                  <a:srgbClr val="536B82"/>
+                </a:solidFill>
+                <a:latin typeface="Liberation Sans"/>
+              </a:rPr>
+              <a:t>BGE + independent projections</a:t>
+            </a:r>
+          </a:p>
+          <a:p>
+            <a:pPr algn="ctr">
+              <a:spcBef>
+                <a:spcPts val="0"/>
+              </a:spcBef>
+              <a:spcAft>
+                <a:spcPts val="0"/>
               </a:spcAft>
             </a:pPr>
             <a:r>
@@ -5764,40 +5783,21 @@
                 </a:solidFill>
                 <a:latin typeface="Liberation Sans"/>
               </a:rPr>
-              <a:t>Video-wise mean / attention</a:t>
-            </a:r>
-          </a:p>
-          <a:p>
-            <a:pPr algn="ctr">
-              <a:spcBef>
-                <a:spcPts val="0"/>
-              </a:spcBef>
-              <a:spcAft>
-                <a:spcPts val="0"/>
-              </a:spcAft>
-            </a:pPr>
-            <a:r>
-              <a:rPr sz="2200" b="0">
-                <a:solidFill>
-                  <a:srgbClr val="536B82"/>
-                </a:solidFill>
-                <a:latin typeface="Liberation Sans"/>
-              </a:rPr>
-              <a:t>384</a:t>
-            </a:r>
-          </a:p>
-        </p:txBody>
-      </p:sp>
-      <p:sp>
-        <p:nvSpPr>
-          <p:cNvPr id="69" name="Graph fusion"/>
+              <a:t>Role fusion E → A · 384</a:t>
+            </a:r>
+          </a:p>
+        </p:txBody>
+      </p:sp>
+      <p:sp>
+        <p:nvSpPr>
+          <p:cNvPr id="69" name="Graph scene MLP"/>
           <p:cNvSpPr/>
           <p:nvPr/>
         </p:nvSpPr>
         <p:spPr>
           <a:xfrm>
-            <a:off x="13487400" y="8869680"/>
-            <a:ext cx="2331720" cy="1188720"/>
+            <a:off x="13487400" y="8641080"/>
+            <a:ext cx="2331720" cy="822960"/>
           </a:xfrm>
           <a:prstGeom prst="roundRect">
             <a:avLst>
@@ -5823,14 +5823,14 @@
       </p:sp>
       <p:sp>
         <p:nvSpPr>
-          <p:cNvPr id="70" name="Graph fusion text"/>
+          <p:cNvPr id="70" name="Graph scene MLP text"/>
           <p:cNvSpPr txBox="1"/>
           <p:nvPr/>
         </p:nvSpPr>
         <p:spPr>
           <a:xfrm>
-            <a:off x="13578840" y="8924544"/>
-            <a:ext cx="2148839" cy="1078992"/>
+            <a:off x="13578840" y="8695944"/>
+            <a:ext cx="2148839" cy="713232"/>
           </a:xfrm>
           <a:prstGeom prst="rect">
             <a:avLst/>
@@ -5852,13 +5852,13 @@
               </a:spcAft>
             </a:pPr>
             <a:r>
-              <a:rPr sz="2400" b="1">
+              <a:rPr sz="2200" b="1">
                 <a:solidFill>
                   <a:srgbClr val="00898D"/>
                 </a:solidFill>
                 <a:latin typeface="Liberation Sans"/>
               </a:rPr>
-              <a:t>Fusion</a:t>
+              <a:t>Scene MLP</a:t>
             </a:r>
           </a:p>
           <a:p>
@@ -5871,20 +5871,114 @@
               </a:spcAft>
             </a:pPr>
             <a:r>
-              <a:rPr sz="2200" b="0">
+              <a:rPr sz="1900" b="0">
                 <a:solidFill>
                   <a:srgbClr val="536B82"/>
                 </a:solidFill>
                 <a:latin typeface="Liberation Sans"/>
               </a:rPr>
-              <a:t>512</a:t>
+              <a:t>Concat 512</a:t>
+            </a:r>
+          </a:p>
+        </p:txBody>
+      </p:sp>
+      <p:sp>
+        <p:nvSpPr>
+          <p:cNvPr id="71" name="Graph mean pooling"/>
+          <p:cNvSpPr/>
+          <p:nvPr/>
+        </p:nvSpPr>
+        <p:spPr>
+          <a:xfrm>
+            <a:off x="13487400" y="9738360"/>
+            <a:ext cx="2331720" cy="731520"/>
+          </a:xfrm>
+          <a:prstGeom prst="roundRect">
+            <a:avLst>
+              <a:gd name="adj" fmla="val 12000"/>
+            </a:avLst>
+          </a:prstGeom>
+          <a:solidFill>
+            <a:srgbClr val="DFF2F0"/>
+          </a:solidFill>
+          <a:ln w="15240">
+            <a:solidFill>
+              <a:srgbClr val="00898D"/>
+            </a:solidFill>
+          </a:ln>
+        </p:spPr>
+        <p:txBody>
+          <a:bodyPr rtlCol="0" anchor="ctr"/>
+          <a:lstStyle/>
+          <a:p>
+            <a:pPr algn="ctr"/>
+          </a:p>
+        </p:txBody>
+      </p:sp>
+      <p:sp>
+        <p:nvSpPr>
+          <p:cNvPr id="72" name="Graph mean pooling text"/>
+          <p:cNvSpPr txBox="1"/>
+          <p:nvPr/>
+        </p:nvSpPr>
+        <p:spPr>
+          <a:xfrm>
+            <a:off x="13578840" y="9793224"/>
+            <a:ext cx="2148839" cy="621792"/>
+          </a:xfrm>
+          <a:prstGeom prst="rect">
+            <a:avLst/>
+          </a:prstGeom>
+          <a:noFill/>
+        </p:spPr>
+        <p:txBody>
+          <a:bodyPr wrap="none" lIns="22860" rIns="22860" tIns="0" bIns="0" anchor="ctr">
+            <a:noAutofit/>
+          </a:bodyPr>
+          <a:lstStyle/>
+          <a:p>
+            <a:pPr algn="ctr">
+              <a:spcBef>
+                <a:spcPts val="0"/>
+              </a:spcBef>
+              <a:spcAft>
+                <a:spcPts val="400"/>
+              </a:spcAft>
+            </a:pPr>
+            <a:r>
+              <a:rPr sz="2000" b="1">
+                <a:solidFill>
+                  <a:srgbClr val="00898D"/>
+                </a:solidFill>
+                <a:latin typeface="Liberation Sans"/>
+              </a:rPr>
+              <a:t>Mean Pooling</a:t>
+            </a:r>
+          </a:p>
+          <a:p>
+            <a:pPr algn="ctr">
+              <a:spcBef>
+                <a:spcPts val="0"/>
+              </a:spcBef>
+              <a:spcAft>
+                <a:spcPts val="0"/>
+              </a:spcAft>
+            </a:pPr>
+            <a:r>
+              <a:rPr sz="1800" b="0">
+                <a:solidFill>
+                  <a:srgbClr val="536B82"/>
+                </a:solidFill>
+                <a:latin typeface="Liberation Sans"/>
+              </a:rPr>
+              <a:t>Item 512</a:t>
             </a:r>
           </a:p>
         </p:txBody>
       </p:sp>
       <p:cxnSp>
         <p:nvCxnSpPr>
-          <p:cNvPr id="71" name="Graphs to graph elements segment 1"/>
+          <p:cNvPr id="73" name="Graphs to graph elements segment 1"/>
           <p:cNvCxnSpPr/>
           <p:nvPr/>
         </p:nvCxnSpPr>
@@ -5919,7 +6013,7 @@
       </p:cxnSp>
       <p:cxnSp>
         <p:nvCxnSpPr>
-          <p:cNvPr id="72" name="Graphs to graph elements segment 2"/>
+          <p:cNvPr id="74" name="Graphs to graph elements segment 2"/>
           <p:cNvCxnSpPr/>
           <p:nvPr/>
         </p:nvCxnSpPr>
@@ -5955,7 +6049,7 @@
       </p:cxnSp>
       <p:sp>
         <p:nvSpPr>
-          <p:cNvPr id="73" name="Graph source fork"/>
+          <p:cNvPr id="75" name="Graph source fork"/>
           <p:cNvSpPr/>
           <p:nvPr/>
         </p:nvSpPr>
@@ -5998,7 +6092,7 @@
       </p:sp>
       <p:cxnSp>
         <p:nvCxnSpPr>
-          <p:cNvPr id="74" name="Graph title to embedding segment 1"/>
+          <p:cNvPr id="76" name="Graph title to embedding segment 1"/>
           <p:cNvCxnSpPr/>
           <p:nvPr/>
         </p:nvCxnSpPr>
@@ -6034,7 +6128,7 @@
       </p:cxnSp>
       <p:cxnSp>
         <p:nvCxnSpPr>
-          <p:cNvPr id="75" name="Graph elements to embedding segment 1"/>
+          <p:cNvPr id="77" name="Graph elements to embedding segment 1"/>
           <p:cNvCxnSpPr/>
           <p:nvPr/>
         </p:nvCxnSpPr>
@@ -6070,7 +6164,7 @@
       </p:cxnSp>
       <p:cxnSp>
         <p:nvCxnSpPr>
-          <p:cNvPr id="76" name="Graph title embedding to merge segment 1"/>
+          <p:cNvPr id="78" name="Graph title embedding to merge segment 1"/>
           <p:cNvCxnSpPr/>
           <p:nvPr/>
         </p:nvCxnSpPr>
@@ -6105,14 +6199,14 @@
       </p:cxnSp>
       <p:cxnSp>
         <p:nvCxnSpPr>
-          <p:cNvPr id="77" name="Graph title embedding to merge segment 2"/>
+          <p:cNvPr id="79" name="Graph title embedding to merge segment 2"/>
           <p:cNvCxnSpPr/>
           <p:nvPr/>
         </p:nvCxnSpPr>
         <p:spPr>
           <a:xfrm>
             <a:off x="13213080" y="8641080"/>
-            <a:ext cx="0" cy="822960"/>
+            <a:ext cx="0" cy="411480"/>
           </a:xfrm>
           <a:prstGeom prst="line">
             <a:avLst/>
@@ -6140,7 +6234,7 @@
       </p:cxnSp>
       <p:cxnSp>
         <p:nvCxnSpPr>
-          <p:cNvPr id="78" name="Graph video embedding to merge segment 1"/>
+          <p:cNvPr id="80" name="Graph video embedding to merge segment 1"/>
           <p:cNvCxnSpPr/>
           <p:nvPr/>
         </p:nvCxnSpPr>
@@ -6175,14 +6269,14 @@
       </p:cxnSp>
       <p:cxnSp>
         <p:nvCxnSpPr>
-          <p:cNvPr id="79" name="Graph video embedding to merge segment 2"/>
+          <p:cNvPr id="81" name="Graph video embedding to merge segment 2"/>
           <p:cNvCxnSpPr/>
           <p:nvPr/>
         </p:nvCxnSpPr>
         <p:spPr>
           <a:xfrm flipV="1">
-            <a:off x="13213080" y="9464040"/>
-            <a:ext cx="0" cy="548640"/>
+            <a:off x="13213080" y="9052560"/>
+            <a:ext cx="0" cy="960120"/>
           </a:xfrm>
           <a:prstGeom prst="line">
             <a:avLst/>
@@ -6210,13 +6304,13 @@
       </p:cxnSp>
       <p:sp>
         <p:nvSpPr>
-          <p:cNvPr id="80" name="Graph embedding merge"/>
+          <p:cNvPr id="82" name="Graph scene input merge"/>
           <p:cNvSpPr/>
           <p:nvPr/>
         </p:nvSpPr>
         <p:spPr>
           <a:xfrm>
-            <a:off x="13181076" y="9432036"/>
+            <a:off x="13181076" y="9020556"/>
             <a:ext cx="64008" cy="64008"/>
           </a:xfrm>
           <a:prstGeom prst="ellipse">
@@ -6253,13 +6347,13 @@
       </p:sp>
       <p:cxnSp>
         <p:nvCxnSpPr>
-          <p:cNvPr id="81" name="Graph embeddings to fusion segment 1"/>
+          <p:cNvPr id="83" name="Graph features to scene MLP segment 1"/>
           <p:cNvCxnSpPr/>
           <p:nvPr/>
         </p:nvCxnSpPr>
         <p:spPr>
           <a:xfrm>
-            <a:off x="13213080" y="9464040"/>
+            <a:off x="13213080" y="9052560"/>
             <a:ext cx="274320" cy="0"/>
           </a:xfrm>
           <a:prstGeom prst="line">
@@ -6289,22 +6383,23 @@
       </p:cxnSp>
       <p:cxnSp>
         <p:nvCxnSpPr>
-          <p:cNvPr id="82" name="Baseline item vectors segment 1"/>
+          <p:cNvPr id="84" name="Scene MLP to mean pooling segment 1"/>
           <p:cNvCxnSpPr/>
           <p:nvPr/>
         </p:nvCxnSpPr>
         <p:spPr>
           <a:xfrm>
-            <a:off x="15819120" y="2651760"/>
-            <a:ext cx="457200" cy="0"/>
+            <a:off x="14653259" y="9464040"/>
+            <a:ext cx="0" cy="274320"/>
           </a:xfrm>
           <a:prstGeom prst="line">
             <a:avLst/>
           </a:prstGeom>
           <a:ln w="22860">
             <a:solidFill>
-              <a:srgbClr val="687581"/>
+              <a:srgbClr val="00898D"/>
             </a:solidFill>
+            <a:tailEnd type="triangle" w="sm" len="sm"/>
           </a:ln>
         </p:spPr>
         <p:style>
@@ -6324,13 +6419,13 @@
       </p:cxnSp>
       <p:cxnSp>
         <p:nvCxnSpPr>
-          <p:cNvPr id="83" name="Text item vectors segment 1"/>
+          <p:cNvPr id="85" name="Baseline item vectors segment 1"/>
           <p:cNvCxnSpPr/>
           <p:nvPr/>
         </p:nvCxnSpPr>
         <p:spPr>
           <a:xfrm>
-            <a:off x="15819120" y="5852160"/>
+            <a:off x="15819120" y="2651760"/>
             <a:ext cx="457200" cy="0"/>
           </a:xfrm>
           <a:prstGeom prst="line">
@@ -6338,7 +6433,7 @@
           </a:prstGeom>
           <a:ln w="22860">
             <a:solidFill>
-              <a:srgbClr val="2C66B7"/>
+              <a:srgbClr val="687581"/>
             </a:solidFill>
           </a:ln>
         </p:spPr>
@@ -6359,13 +6454,13 @@
       </p:cxnSp>
       <p:cxnSp>
         <p:nvCxnSpPr>
-          <p:cNvPr id="84" name="Graph item vectors segment 1"/>
+          <p:cNvPr id="86" name="Text item vectors segment 1"/>
           <p:cNvCxnSpPr/>
           <p:nvPr/>
         </p:nvCxnSpPr>
         <p:spPr>
           <a:xfrm>
-            <a:off x="15819120" y="9464040"/>
+            <a:off x="15819120" y="5852160"/>
             <a:ext cx="457200" cy="0"/>
           </a:xfrm>
           <a:prstGeom prst="line">
@@ -6373,7 +6468,7 @@
           </a:prstGeom>
           <a:ln w="22860">
             <a:solidFill>
-              <a:srgbClr val="00898D"/>
+              <a:srgbClr val="2C66B7"/>
             </a:solidFill>
           </a:ln>
         </p:spPr>
@@ -6394,21 +6489,21 @@
       </p:cxnSp>
       <p:cxnSp>
         <p:nvCxnSpPr>
-          <p:cNvPr id="85" name="Alternative item vector bus segment 1"/>
+          <p:cNvPr id="87" name="Graph item vectors segment 1"/>
           <p:cNvCxnSpPr/>
           <p:nvPr/>
         </p:nvCxnSpPr>
         <p:spPr>
           <a:xfrm>
-            <a:off x="16276320" y="2651760"/>
-            <a:ext cx="0" cy="6812280"/>
+            <a:off x="15819120" y="10104120"/>
+            <a:ext cx="457200" cy="0"/>
           </a:xfrm>
           <a:prstGeom prst="line">
             <a:avLst/>
           </a:prstGeom>
           <a:ln w="22860">
             <a:solidFill>
-              <a:srgbClr val="183450"/>
+              <a:srgbClr val="00898D"/>
             </a:solidFill>
           </a:ln>
         </p:spPr>
@@ -6427,9 +6522,44 @@
           </a:fontRef>
         </p:style>
       </p:cxnSp>
-      <p:sp>
-        <p:nvSpPr>
-          <p:cNvPr id="86" name="Item bus junction"/>
+      <p:cxnSp>
+        <p:nvCxnSpPr>
+          <p:cNvPr id="88" name="Alternative item vector bus segment 1"/>
+          <p:cNvCxnSpPr/>
+          <p:nvPr/>
+        </p:nvCxnSpPr>
+        <p:spPr>
+          <a:xfrm>
+            <a:off x="16276320" y="2651760"/>
+            <a:ext cx="0" cy="7452360"/>
+          </a:xfrm>
+          <a:prstGeom prst="line">
+            <a:avLst/>
+          </a:prstGeom>
+          <a:ln w="22860">
+            <a:solidFill>
+              <a:srgbClr val="183450"/>
+            </a:solidFill>
+          </a:ln>
+        </p:spPr>
+        <p:style>
+          <a:lnRef idx="2">
+            <a:schemeClr val="accent1"/>
+          </a:lnRef>
+          <a:fillRef idx="0">
+            <a:schemeClr val="accent1"/>
+          </a:fillRef>
+          <a:effectRef idx="1">
+            <a:schemeClr val="accent1"/>
+          </a:effectRef>
+          <a:fontRef idx="minor">
+            <a:schemeClr val="tx1"/>
+          </a:fontRef>
+        </p:style>
+      </p:cxnSp>
+      <p:sp>
+        <p:nvSpPr>
+          <p:cNvPr id="89" name="Item bus junction"/>
           <p:cNvSpPr/>
           <p:nvPr/>
         </p:nvSpPr>
@@ -6472,7 +6602,7 @@
       </p:sp>
       <p:sp>
         <p:nvSpPr>
-          <p:cNvPr id="87" name="Item bus junction"/>
+          <p:cNvPr id="90" name="Item bus junction"/>
           <p:cNvSpPr/>
           <p:nvPr/>
         </p:nvSpPr>
@@ -6515,7 +6645,7 @@
       </p:sp>
       <p:sp>
         <p:nvSpPr>
-          <p:cNvPr id="88" name="Item bus junction"/>
+          <p:cNvPr id="91" name="Item bus junction"/>
           <p:cNvSpPr/>
           <p:nvPr/>
         </p:nvSpPr>
@@ -6558,13 +6688,13 @@
       </p:sp>
       <p:sp>
         <p:nvSpPr>
-          <p:cNvPr id="89" name="Item bus junction"/>
+          <p:cNvPr id="92" name="Item bus junction"/>
           <p:cNvSpPr/>
           <p:nvPr/>
         </p:nvSpPr>
         <p:spPr>
           <a:xfrm>
-            <a:off x="16244316" y="9432036"/>
+            <a:off x="16244316" y="10072116"/>
             <a:ext cx="64008" cy="64008"/>
           </a:xfrm>
           <a:prstGeom prst="ellipse">
@@ -6601,7 +6731,7 @@
       </p:sp>
       <p:sp>
         <p:nvSpPr>
-          <p:cNvPr id="90" name="Recommendation"/>
+          <p:cNvPr id="93" name="Recommendation"/>
           <p:cNvSpPr/>
           <p:nvPr/>
         </p:nvSpPr>
@@ -6634,7 +6764,7 @@
       </p:sp>
       <p:sp>
         <p:nvSpPr>
-          <p:cNvPr id="91" name="Recommendation heading"/>
+          <p:cNvPr id="94" name="Recommendation heading"/>
           <p:cNvSpPr txBox="1"/>
           <p:nvPr/>
         </p:nvSpPr>
@@ -6676,7 +6806,7 @@
       </p:sp>
       <p:sp>
         <p:nvSpPr>
-          <p:cNvPr id="92" name="Text path arms"/>
+          <p:cNvPr id="95" name="Text path arms"/>
           <p:cNvSpPr txBox="1"/>
           <p:nvPr/>
         </p:nvSpPr>
@@ -6832,7 +6962,7 @@
       </p:sp>
       <p:sp>
         <p:nvSpPr>
-          <p:cNvPr id="93" name="Graph path arms"/>
+          <p:cNvPr id="96" name="Graph path arms"/>
           <p:cNvSpPr txBox="1"/>
           <p:nvPr/>
         </p:nvSpPr>
@@ -6950,7 +7080,7 @@
       </p:sp>
       <p:cxnSp>
         <p:nvCxnSpPr>
-          <p:cNvPr id="94" name="Item vectors to recommendation segment 1"/>
+          <p:cNvPr id="97" name="Item vectors to recommendation segment 1"/>
           <p:cNvCxnSpPr/>
           <p:nvPr/>
         </p:nvCxnSpPr>
@@ -6984,48 +7114,6 @@
           </a:fontRef>
         </p:style>
       </p:cxnSp>
-      <p:sp>
-        <p:nvSpPr>
-          <p:cNvPr id="95" name="BGE legend"/>
-          <p:cNvSpPr txBox="1"/>
-          <p:nvPr/>
-        </p:nvSpPr>
-        <p:spPr>
-          <a:xfrm>
-            <a:off x="548640" y="11064240"/>
-            <a:ext cx="9601200" cy="365760"/>
-          </a:xfrm>
-          <a:prstGeom prst="rect">
-            <a:avLst/>
-          </a:prstGeom>
-          <a:noFill/>
-        </p:spPr>
-        <p:txBody>
-          <a:bodyPr wrap="none" lIns="22860" rIns="22860" tIns="0" bIns="0" anchor="ctr">
-            <a:noAutofit/>
-          </a:bodyPr>
-          <a:lstStyle/>
-          <a:p>
-            <a:pPr algn="l">
-              <a:spcBef>
-                <a:spcPts val="0"/>
-              </a:spcBef>
-              <a:spcAft>
-                <a:spcPts val="0"/>
-              </a:spcAft>
-            </a:pPr>
-            <a:r>
-              <a:rPr sz="2000" b="0">
-                <a:solidFill>
-                  <a:srgbClr val="183450"/>
-                </a:solidFill>
-                <a:latin typeface="Liberation Sans"/>
-              </a:rPr>
-              <a:t>Text embedding: bge-small-en-v1.5</a:t>
-            </a:r>
-          </a:p>
-        </p:txBody>
-      </p:sp>
     </p:spTree>
   </p:cSld>
   <p:clrMapOvr>

--- a/docs/design/main_diagram.pptx
+++ b/docs/design/main_diagram.pptx
@@ -105,6 +105,426 @@
     </a:lvl9pPr>
   </p:defaultTextStyle>
 </p:presentation>
+</file>
+
+<file path=ppt/notesMasters/notesMaster1.xml><?xml version="1.0" encoding="utf-8"?>
+<p:notesMaster xmlns:a="http://schemas.openxmlformats.org/drawingml/2006/main" xmlns:p="http://schemas.openxmlformats.org/presentationml/2006/main" xmlns:r="http://schemas.openxmlformats.org/officeDocument/2006/relationships">
+  <p:cSld>
+    <p:bg>
+      <p:bgRef idx="1001">
+        <a:schemeClr val="bg1"/>
+      </p:bgRef>
+    </p:bg>
+    <p:spTree>
+      <p:nvGrpSpPr>
+        <p:cNvPr id="1" name=""/>
+        <p:cNvGrpSpPr/>
+        <p:nvPr/>
+      </p:nvGrpSpPr>
+      <p:grpSpPr>
+        <a:xfrm>
+          <a:off x="0" y="0"/>
+          <a:ext cx="0" cy="0"/>
+          <a:chOff x="0" y="0"/>
+          <a:chExt cx="0" cy="0"/>
+        </a:xfrm>
+      </p:grpSpPr>
+      <p:sp>
+        <p:nvSpPr>
+          <p:cNvPr id="2" name="Header Placeholder 1"/>
+          <p:cNvSpPr>
+            <a:spLocks noGrp="1"/>
+          </p:cNvSpPr>
+          <p:nvPr>
+            <p:ph type="hdr" sz="quarter"/>
+          </p:nvPr>
+        </p:nvSpPr>
+        <p:spPr>
+          <a:xfrm>
+            <a:off x="0" y="0"/>
+            <a:ext cx="2971800" cy="457200"/>
+          </a:xfrm>
+          <a:prstGeom prst="rect">
+            <a:avLst/>
+          </a:prstGeom>
+        </p:spPr>
+        <p:txBody>
+          <a:bodyPr vert="horz" lIns="91440" tIns="45720" rIns="91440" bIns="45720" rtlCol="0"/>
+          <a:lstStyle>
+            <a:lvl1pPr algn="l">
+              <a:defRPr sz="1200"/>
+            </a:lvl1pPr>
+          </a:lstStyle>
+          <a:p>
+            <a:endParaRPr lang="en-US"/>
+          </a:p>
+        </p:txBody>
+      </p:sp>
+      <p:sp>
+        <p:nvSpPr>
+          <p:cNvPr id="3" name="Date Placeholder 2"/>
+          <p:cNvSpPr>
+            <a:spLocks noGrp="1"/>
+          </p:cNvSpPr>
+          <p:nvPr>
+            <p:ph type="dt" idx="1"/>
+          </p:nvPr>
+        </p:nvSpPr>
+        <p:spPr>
+          <a:xfrm>
+            <a:off x="3884613" y="0"/>
+            <a:ext cx="2971800" cy="457200"/>
+          </a:xfrm>
+          <a:prstGeom prst="rect">
+            <a:avLst/>
+          </a:prstGeom>
+        </p:spPr>
+        <p:txBody>
+          <a:bodyPr vert="horz" lIns="91440" tIns="45720" rIns="91440" bIns="45720" rtlCol="0"/>
+          <a:lstStyle>
+            <a:lvl1pPr algn="r">
+              <a:defRPr sz="1200"/>
+            </a:lvl1pPr>
+          </a:lstStyle>
+          <a:p>
+            <a:fld id="{0F89C1C7-3DCD-1040-A9CF-14679D8B5DDD}" type="datetimeFigureOut">
+              <a:rPr lang="en-US" smtClean="0"/>
+              <a:t>10/17/16</a:t>
+            </a:fld>
+            <a:endParaRPr lang="en-US"/>
+          </a:p>
+        </p:txBody>
+      </p:sp>
+      <p:sp>
+        <p:nvSpPr>
+          <p:cNvPr id="4" name="Slide Image Placeholder 3"/>
+          <p:cNvSpPr>
+            <a:spLocks noGrp="1" noRot="1" noChangeAspect="1"/>
+          </p:cNvSpPr>
+          <p:nvPr>
+            <p:ph type="sldImg" idx="2"/>
+          </p:nvPr>
+        </p:nvSpPr>
+        <p:spPr>
+          <a:xfrm>
+            <a:off x="1143000" y="685800"/>
+            <a:ext cx="4572000" cy="3429000"/>
+          </a:xfrm>
+          <a:prstGeom prst="rect">
+            <a:avLst/>
+          </a:prstGeom>
+          <a:noFill/>
+          <a:ln w="12700">
+            <a:solidFill>
+              <a:prstClr val="black"/>
+            </a:solidFill>
+          </a:ln>
+        </p:spPr>
+        <p:txBody>
+          <a:bodyPr vert="horz" lIns="91440" tIns="45720" rIns="91440" bIns="45720" rtlCol="0" anchor="ctr"/>
+          <a:lstStyle/>
+          <a:p>
+            <a:endParaRPr lang="en-US"/>
+          </a:p>
+        </p:txBody>
+      </p:sp>
+      <p:sp>
+        <p:nvSpPr>
+          <p:cNvPr id="5" name="Notes Placeholder 4"/>
+          <p:cNvSpPr>
+            <a:spLocks noGrp="1"/>
+          </p:cNvSpPr>
+          <p:nvPr>
+            <p:ph type="body" sz="quarter" idx="3"/>
+          </p:nvPr>
+        </p:nvSpPr>
+        <p:spPr>
+          <a:xfrm>
+            <a:off x="685800" y="4343400"/>
+            <a:ext cx="5486400" cy="4114800"/>
+          </a:xfrm>
+          <a:prstGeom prst="rect">
+            <a:avLst/>
+          </a:prstGeom>
+        </p:spPr>
+        <p:txBody>
+          <a:bodyPr vert="horz" lIns="91440" tIns="45720" rIns="91440" bIns="45720" rtlCol="0"/>
+          <a:lstStyle/>
+          <a:p>
+            <a:pPr lvl="0"/>
+            <a:r>
+              <a:rPr lang="en-US" smtClean="0"/>
+              <a:t>Click to edit Master text styles</a:t>
+            </a:r>
+          </a:p>
+          <a:p>
+            <a:pPr lvl="1"/>
+            <a:r>
+              <a:rPr lang="en-US" smtClean="0"/>
+              <a:t>Second level</a:t>
+            </a:r>
+          </a:p>
+          <a:p>
+            <a:pPr lvl="2"/>
+            <a:r>
+              <a:rPr lang="en-US" smtClean="0"/>
+              <a:t>Third level</a:t>
+            </a:r>
+          </a:p>
+          <a:p>
+            <a:pPr lvl="3"/>
+            <a:r>
+              <a:rPr lang="en-US" smtClean="0"/>
+              <a:t>Fourth level</a:t>
+            </a:r>
+          </a:p>
+          <a:p>
+            <a:pPr lvl="4"/>
+            <a:r>
+              <a:rPr lang="en-US" smtClean="0"/>
+              <a:t>Fifth level</a:t>
+            </a:r>
+            <a:endParaRPr lang="en-US"/>
+          </a:p>
+        </p:txBody>
+      </p:sp>
+      <p:sp>
+        <p:nvSpPr>
+          <p:cNvPr id="6" name="Footer Placeholder 5"/>
+          <p:cNvSpPr>
+            <a:spLocks noGrp="1"/>
+          </p:cNvSpPr>
+          <p:nvPr>
+            <p:ph type="ftr" sz="quarter" idx="4"/>
+          </p:nvPr>
+        </p:nvSpPr>
+        <p:spPr>
+          <a:xfrm>
+            <a:off x="0" y="8685213"/>
+            <a:ext cx="2971800" cy="457200"/>
+          </a:xfrm>
+          <a:prstGeom prst="rect">
+            <a:avLst/>
+          </a:prstGeom>
+        </p:spPr>
+        <p:txBody>
+          <a:bodyPr vert="horz" lIns="91440" tIns="45720" rIns="91440" bIns="45720" rtlCol="0" anchor="b"/>
+          <a:lstStyle>
+            <a:lvl1pPr algn="l">
+              <a:defRPr sz="1200"/>
+            </a:lvl1pPr>
+          </a:lstStyle>
+          <a:p>
+            <a:endParaRPr lang="en-US"/>
+          </a:p>
+        </p:txBody>
+      </p:sp>
+      <p:sp>
+        <p:nvSpPr>
+          <p:cNvPr id="7" name="Slide Number Placeholder 6"/>
+          <p:cNvSpPr>
+            <a:spLocks noGrp="1"/>
+          </p:cNvSpPr>
+          <p:nvPr>
+            <p:ph type="sldNum" sz="quarter" idx="5"/>
+          </p:nvPr>
+        </p:nvSpPr>
+        <p:spPr>
+          <a:xfrm>
+            <a:off x="3884613" y="8685213"/>
+            <a:ext cx="2971800" cy="457200"/>
+          </a:xfrm>
+          <a:prstGeom prst="rect">
+            <a:avLst/>
+          </a:prstGeom>
+        </p:spPr>
+        <p:txBody>
+          <a:bodyPr vert="horz" lIns="91440" tIns="45720" rIns="91440" bIns="45720" rtlCol="0" anchor="b"/>
+          <a:lstStyle>
+            <a:lvl1pPr algn="r">
+              <a:defRPr sz="1200"/>
+            </a:lvl1pPr>
+          </a:lstStyle>
+          <a:p>
+            <a:fld id="{BB5E49A5-4136-284D-997B-48E1D791AD67}" type="slidenum">
+              <a:rPr lang="en-US" smtClean="0"/>
+              <a:t>‹#›</a:t>
+            </a:fld>
+            <a:endParaRPr lang="en-US"/>
+          </a:p>
+        </p:txBody>
+      </p:sp>
+    </p:spTree>
+    <p:extLst>
+      <p:ext uri="{BB962C8B-B14F-4D97-AF65-F5344CB8AC3E}">
+        <p14:creationId xmlns:p14="http://schemas.microsoft.com/office/powerpoint/2010/main" val="2623252185"/>
+      </p:ext>
+    </p:extLst>
+  </p:cSld>
+  <p:clrMap bg1="lt1" tx1="dk1" bg2="lt2" tx2="dk2" accent1="accent1" accent2="accent2" accent3="accent3" accent4="accent4" accent5="accent5" accent6="accent6" hlink="hlink" folHlink="folHlink"/>
+  <p:notesStyle>
+    <a:lvl1pPr marL="0" algn="l" defTabSz="457200" rtl="0" eaLnBrk="1" latinLnBrk="0" hangingPunct="1">
+      <a:defRPr sz="1200" kern="1200">
+        <a:solidFill>
+          <a:schemeClr val="tx1"/>
+        </a:solidFill>
+        <a:latin typeface="+mn-lt"/>
+        <a:ea typeface="+mn-ea"/>
+        <a:cs typeface="+mn-cs"/>
+      </a:defRPr>
+    </a:lvl1pPr>
+    <a:lvl2pPr marL="457200" algn="l" defTabSz="457200" rtl="0" eaLnBrk="1" latinLnBrk="0" hangingPunct="1">
+      <a:defRPr sz="1200" kern="1200">
+        <a:solidFill>
+          <a:schemeClr val="tx1"/>
+        </a:solidFill>
+        <a:latin typeface="+mn-lt"/>
+        <a:ea typeface="+mn-ea"/>
+        <a:cs typeface="+mn-cs"/>
+      </a:defRPr>
+    </a:lvl2pPr>
+    <a:lvl3pPr marL="914400" algn="l" defTabSz="457200" rtl="0" eaLnBrk="1" latinLnBrk="0" hangingPunct="1">
+      <a:defRPr sz="1200" kern="1200">
+        <a:solidFill>
+          <a:schemeClr val="tx1"/>
+        </a:solidFill>
+        <a:latin typeface="+mn-lt"/>
+        <a:ea typeface="+mn-ea"/>
+        <a:cs typeface="+mn-cs"/>
+      </a:defRPr>
+    </a:lvl3pPr>
+    <a:lvl4pPr marL="1371600" algn="l" defTabSz="457200" rtl="0" eaLnBrk="1" latinLnBrk="0" hangingPunct="1">
+      <a:defRPr sz="1200" kern="1200">
+        <a:solidFill>
+          <a:schemeClr val="tx1"/>
+        </a:solidFill>
+        <a:latin typeface="+mn-lt"/>
+        <a:ea typeface="+mn-ea"/>
+        <a:cs typeface="+mn-cs"/>
+      </a:defRPr>
+    </a:lvl4pPr>
+    <a:lvl5pPr marL="1828800" algn="l" defTabSz="457200" rtl="0" eaLnBrk="1" latinLnBrk="0" hangingPunct="1">
+      <a:defRPr sz="1200" kern="1200">
+        <a:solidFill>
+          <a:schemeClr val="tx1"/>
+        </a:solidFill>
+        <a:latin typeface="+mn-lt"/>
+        <a:ea typeface="+mn-ea"/>
+        <a:cs typeface="+mn-cs"/>
+      </a:defRPr>
+    </a:lvl5pPr>
+    <a:lvl6pPr marL="2286000" algn="l" defTabSz="457200" rtl="0" eaLnBrk="1" latinLnBrk="0" hangingPunct="1">
+      <a:defRPr sz="1200" kern="1200">
+        <a:solidFill>
+          <a:schemeClr val="tx1"/>
+        </a:solidFill>
+        <a:latin typeface="+mn-lt"/>
+        <a:ea typeface="+mn-ea"/>
+        <a:cs typeface="+mn-cs"/>
+      </a:defRPr>
+    </a:lvl6pPr>
+    <a:lvl7pPr marL="2743200" algn="l" defTabSz="457200" rtl="0" eaLnBrk="1" latinLnBrk="0" hangingPunct="1">
+      <a:defRPr sz="1200" kern="1200">
+        <a:solidFill>
+          <a:schemeClr val="tx1"/>
+        </a:solidFill>
+        <a:latin typeface="+mn-lt"/>
+        <a:ea typeface="+mn-ea"/>
+        <a:cs typeface="+mn-cs"/>
+      </a:defRPr>
+    </a:lvl7pPr>
+    <a:lvl8pPr marL="3200400" algn="l" defTabSz="457200" rtl="0" eaLnBrk="1" latinLnBrk="0" hangingPunct="1">
+      <a:defRPr sz="1200" kern="1200">
+        <a:solidFill>
+          <a:schemeClr val="tx1"/>
+        </a:solidFill>
+        <a:latin typeface="+mn-lt"/>
+        <a:ea typeface="+mn-ea"/>
+        <a:cs typeface="+mn-cs"/>
+      </a:defRPr>
+    </a:lvl8pPr>
+    <a:lvl9pPr marL="3657600" algn="l" defTabSz="457200" rtl="0" eaLnBrk="1" latinLnBrk="0" hangingPunct="1">
+      <a:defRPr sz="1200" kern="1200">
+        <a:solidFill>
+          <a:schemeClr val="tx1"/>
+        </a:solidFill>
+        <a:latin typeface="+mn-lt"/>
+        <a:ea typeface="+mn-ea"/>
+        <a:cs typeface="+mn-cs"/>
+      </a:defRPr>
+    </a:lvl9pPr>
+  </p:notesStyle>
+</p:notesMaster>
+</file>
+
+<file path=ppt/notesSlides/notesSlide1.xml><?xml version="1.0" encoding="utf-8"?>
+<p:notes xmlns:a="http://schemas.openxmlformats.org/drawingml/2006/main" xmlns:p="http://schemas.openxmlformats.org/presentationml/2006/main" xmlns:r="http://schemas.openxmlformats.org/officeDocument/2006/relationships">
+  <p:cSld>
+    <p:spTree>
+      <p:nvGrpSpPr>
+        <p:cNvPr id="1" name=""/>
+        <p:cNvGrpSpPr/>
+        <p:nvPr/>
+      </p:nvGrpSpPr>
+      <p:grpSpPr>
+        <a:xfrm>
+          <a:off x="0" y="0"/>
+          <a:ext cx="0" cy="0"/>
+          <a:chOff x="0" y="0"/>
+          <a:chExt cx="0" cy="0"/>
+        </a:xfrm>
+      </p:grpSpPr>
+      <p:sp>
+        <p:nvSpPr>
+          <p:cNvPr id="2" name="Slide Image Placeholder 1"/>
+          <p:cNvSpPr>
+            <a:spLocks noGrp="1"/>
+          </p:cNvSpPr>
+          <p:nvPr>
+            <p:ph type="sldImg" idx="2"/>
+          </p:nvPr>
+        </p:nvSpPr>
+        <p:spPr/>
+      </p:sp>
+      <p:sp>
+        <p:nvSpPr>
+          <p:cNvPr id="3" name="Notes Placeholder 2"/>
+          <p:cNvSpPr>
+            <a:spLocks noGrp="1"/>
+          </p:cNvSpPr>
+          <p:nvPr>
+            <p:ph type="body" idx="3" sz="quarter"/>
+          </p:nvPr>
+        </p:nvSpPr>
+        <p:spPr/>
+        <p:txBody>
+          <a:bodyPr/>
+          <a:lstStyle/>
+          <a:p>
+            <a:r>
+              <a:t>Scene extraction supports qwen3vl, qwen3.5 and gemini. Graphs feed both paths; Descriptions feed only the Summary-based Text path. Title is excluded from extraction and summarization. Title branches shown here are used only by title-enabled arms; other arms mask the title component. BGE features are frozen; video encoders and SASRec train jointly. The three item-vector paths are alternative models, not concatenated outputs. Direct Graph uses the selected aggregation after its Scene MLP. Current arm names and required inputs are listed in README.</a:t>
+            </a:r>
+          </a:p>
+        </p:txBody>
+      </p:sp>
+      <p:sp>
+        <p:nvSpPr>
+          <p:cNvPr id="4" name="Slide Number Placeholder 3"/>
+          <p:cNvSpPr>
+            <a:spLocks noGrp="1"/>
+          </p:cNvSpPr>
+          <p:nvPr>
+            <p:ph type="sldNum" idx="5" sz="quarter"/>
+          </p:nvPr>
+        </p:nvSpPr>
+        <p:spPr/>
+      </p:sp>
+    </p:spTree>
+  </p:cSld>
+  <p:clrMapOvr>
+    <a:masterClrMapping/>
+  </p:clrMapOvr>
+</p:notes>
 </file>
 
 <file path=ppt/slideLayouts/slideLayout1.xml><?xml version="1.0" encoding="utf-8"?>
@@ -3648,13 +4068,13 @@
               </a:spcAft>
             </a:pPr>
             <a:r>
-              <a:rPr sz="2200" b="0">
+              <a:rPr sz="1600" b="0">
                 <a:solidFill>
                   <a:srgbClr val="536B82"/>
                 </a:solidFill>
                 <a:latin typeface="Liberation Sans"/>
               </a:rPr>
-              <a:t>Qwen / Gemini</a:t>
+              <a:t>Qwen3-VL · Qwen3.5 · Gemini</a:t>
             </a:r>
           </a:p>
         </p:txBody>
@@ -5884,7 +6304,7 @@
       </p:sp>
       <p:sp>
         <p:nvSpPr>
-          <p:cNvPr id="71" name="Graph mean pooling"/>
+          <p:cNvPr id="71" name="Graph aggregation"/>
           <p:cNvSpPr/>
           <p:nvPr/>
         </p:nvSpPr>
@@ -5917,7 +6337,7 @@
       </p:sp>
       <p:sp>
         <p:nvSpPr>
-          <p:cNvPr id="72" name="Graph mean pooling text"/>
+          <p:cNvPr id="72" name="Graph aggregation text"/>
           <p:cNvSpPr txBox="1"/>
           <p:nvPr/>
         </p:nvSpPr>
@@ -5952,7 +6372,7 @@
                 </a:solidFill>
                 <a:latin typeface="Liberation Sans"/>
               </a:rPr>
-              <a:t>Mean Pooling</a:t>
+              <a:t>Aggregation</a:t>
             </a:r>
           </a:p>
           <a:p>
@@ -6383,7 +6803,7 @@
       </p:cxnSp>
       <p:cxnSp>
         <p:nvCxnSpPr>
-          <p:cNvPr id="84" name="Scene MLP to mean pooling segment 1"/>
+          <p:cNvPr id="84" name="Scene MLP to aggregation segment 1"/>
           <p:cNvCxnSpPr/>
           <p:nvPr/>
         </p:nvCxnSpPr>
@@ -6806,14 +7226,14 @@
       </p:sp>
       <p:sp>
         <p:nvSpPr>
-          <p:cNvPr id="95" name="Text path arms"/>
+          <p:cNvPr id="95" name="User representation"/>
           <p:cNvSpPr txBox="1"/>
           <p:nvPr/>
         </p:nvSpPr>
         <p:spPr>
           <a:xfrm>
-            <a:off x="17236440" y="4754880"/>
-            <a:ext cx="3474720" cy="3017520"/>
+            <a:off x="17236440" y="4709160"/>
+            <a:ext cx="3474720" cy="1691640"/>
           </a:xfrm>
           <a:prstGeom prst="rect">
             <a:avLst/>
@@ -6826,7 +7246,7 @@
           </a:bodyPr>
           <a:lstStyle/>
           <a:p>
-            <a:pPr algn="l">
+            <a:pPr algn="ctr">
               <a:spcBef>
                 <a:spcPts val="0"/>
               </a:spcBef>
@@ -6837,15 +7257,15 @@
             <a:r>
               <a:rPr sz="2200" b="1">
                 <a:solidFill>
-                  <a:srgbClr val="2C66B7"/>
+                  <a:srgbClr val="183450"/>
                 </a:solidFill>
                 <a:latin typeface="Liberation Sans"/>
               </a:rPr>
-              <a:t>Text Path</a:t>
-            </a:r>
-          </a:p>
-          <a:p>
-            <a:pPr algn="l">
+              <a:t>Viewing history</a:t>
+            </a:r>
+          </a:p>
+          <a:p>
+            <a:pPr algn="ctr">
               <a:spcBef>
                 <a:spcPts val="0"/>
               </a:spcBef>
@@ -6854,17 +7274,17 @@
               </a:spcAft>
             </a:pPr>
             <a:r>
-              <a:rPr sz="2000" b="0">
+              <a:rPr sz="1900" b="0">
                 <a:solidFill>
-                  <a:srgbClr val="183450"/>
+                  <a:srgbClr val="536B82"/>
                 </a:solidFill>
                 <a:latin typeface="Liberation Sans"/>
               </a:rPr>
-              <a:t>• Meta</a:t>
-            </a:r>
-          </a:p>
-          <a:p>
-            <a:pPr algn="l">
+              <a:t>Past item vectors</a:t>
+            </a:r>
+          </a:p>
+          <a:p>
+            <a:pPr algn="ctr">
               <a:spcBef>
                 <a:spcPts val="0"/>
               </a:spcBef>
@@ -6873,17 +7293,59 @@
               </a:spcAft>
             </a:pPr>
             <a:r>
-              <a:rPr sz="2000" b="0">
+              <a:rPr sz="1900" b="0">
                 <a:solidFill>
                   <a:srgbClr val="183450"/>
                 </a:solidFill>
                 <a:latin typeface="Liberation Sans"/>
               </a:rPr>
-              <a:t>• Graph_Qwen</a:t>
-            </a:r>
-          </a:p>
-          <a:p>
-            <a:pPr algn="l">
+              <a:t>SASRec + User MLP</a:t>
+            </a:r>
+          </a:p>
+          <a:p>
+            <a:pPr algn="ctr">
+              <a:spcBef>
+                <a:spcPts val="0"/>
+              </a:spcBef>
+              <a:spcAft>
+                <a:spcPts val="0"/>
+              </a:spcAft>
+            </a:pPr>
+            <a:r>
+              <a:rPr sz="2000" b="1">
+                <a:solidFill>
+                  <a:srgbClr val="183450"/>
+                </a:solidFill>
+                <a:latin typeface="Liberation Sans"/>
+              </a:rPr>
+              <a:t>User 512</a:t>
+            </a:r>
+          </a:p>
+        </p:txBody>
+      </p:sp>
+      <p:sp>
+        <p:nvSpPr>
+          <p:cNvPr id="96" name="Candidate scoring"/>
+          <p:cNvSpPr txBox="1"/>
+          <p:nvPr/>
+        </p:nvSpPr>
+        <p:spPr>
+          <a:xfrm>
+            <a:off x="17236440" y="6995160"/>
+            <a:ext cx="3474720" cy="1691640"/>
+          </a:xfrm>
+          <a:prstGeom prst="rect">
+            <a:avLst/>
+          </a:prstGeom>
+          <a:noFill/>
+        </p:spPr>
+        <p:txBody>
+          <a:bodyPr wrap="none" lIns="22860" rIns="22860" tIns="0" bIns="0" anchor="ctr">
+            <a:noAutofit/>
+          </a:bodyPr>
+          <a:lstStyle/>
+          <a:p>
+            <a:pPr algn="ctr">
               <a:spcBef>
                 <a:spcPts val="0"/>
               </a:spcBef>
@@ -6892,17 +7354,17 @@
               </a:spcAft>
             </a:pPr>
             <a:r>
-              <a:rPr sz="2000" b="0">
+              <a:rPr sz="2200" b="1">
                 <a:solidFill>
                   <a:srgbClr val="183450"/>
                 </a:solidFill>
                 <a:latin typeface="Liberation Sans"/>
               </a:rPr>
-              <a:t>• Graph_Qwen_Meta</a:t>
-            </a:r>
-          </a:p>
-          <a:p>
-            <a:pPr algn="l">
+              <a:t>Candidate scoring</a:t>
+            </a:r>
+          </a:p>
+          <a:p>
+            <a:pPr algn="ctr">
               <a:spcBef>
                 <a:spcPts val="0"/>
               </a:spcBef>
@@ -6911,17 +7373,17 @@
               </a:spcAft>
             </a:pPr>
             <a:r>
-              <a:rPr sz="2000" b="0">
+              <a:rPr sz="1800" b="0">
                 <a:solidFill>
-                  <a:srgbClr val="183450"/>
+                  <a:srgbClr val="536B82"/>
                 </a:solidFill>
                 <a:latin typeface="Liberation Sans"/>
               </a:rPr>
-              <a:t>• Graph_Gemini_Meta</a:t>
-            </a:r>
-          </a:p>
-          <a:p>
-            <a:pPr algn="l">
+              <a:t>Candidate item vectors</a:t>
+            </a:r>
+          </a:p>
+          <a:p>
+            <a:pPr algn="ctr">
               <a:spcBef>
                 <a:spcPts val="0"/>
               </a:spcBef>
@@ -6930,15 +7392,137 @@
               </a:spcAft>
             </a:pPr>
             <a:r>
-              <a:rPr sz="2000" b="0">
+              <a:rPr sz="2000" b="1">
                 <a:solidFill>
                   <a:srgbClr val="183450"/>
                 </a:solidFill>
                 <a:latin typeface="Liberation Sans"/>
               </a:rPr>
-              <a:t>• Desc_Qwen_Meta</a:t>
-            </a:r>
-          </a:p>
+              <a:t>User · Candidate</a:t>
+            </a:r>
+          </a:p>
+          <a:p>
+            <a:pPr algn="ctr">
+              <a:spcBef>
+                <a:spcPts val="0"/>
+              </a:spcBef>
+              <a:spcAft>
+                <a:spcPts val="0"/>
+              </a:spcAft>
+            </a:pPr>
+            <a:r>
+              <a:rPr sz="1900" b="0">
+                <a:solidFill>
+                  <a:srgbClr val="536B82"/>
+                </a:solidFill>
+                <a:latin typeface="Liberation Sans"/>
+              </a:rPr>
+              <a:t>Full-catalog ranking</a:t>
+            </a:r>
+          </a:p>
+        </p:txBody>
+      </p:sp>
+      <p:sp>
+        <p:nvSpPr>
+          <p:cNvPr id="97" name="Evaluation"/>
+          <p:cNvSpPr txBox="1"/>
+          <p:nvPr/>
+        </p:nvSpPr>
+        <p:spPr>
+          <a:xfrm>
+            <a:off x="17236440" y="9189720"/>
+            <a:ext cx="3474720" cy="1143000"/>
+          </a:xfrm>
+          <a:prstGeom prst="rect">
+            <a:avLst/>
+          </a:prstGeom>
+          <a:noFill/>
+        </p:spPr>
+        <p:txBody>
+          <a:bodyPr wrap="none" lIns="22860" rIns="22860" tIns="0" bIns="0" anchor="ctr">
+            <a:noAutofit/>
+          </a:bodyPr>
+          <a:lstStyle/>
+          <a:p>
+            <a:pPr algn="ctr">
+              <a:spcBef>
+                <a:spcPts val="0"/>
+              </a:spcBef>
+              <a:spcAft>
+                <a:spcPts val="400"/>
+              </a:spcAft>
+            </a:pPr>
+            <a:r>
+              <a:rPr sz="2200" b="1">
+                <a:solidFill>
+                  <a:srgbClr val="183450"/>
+                </a:solidFill>
+                <a:latin typeface="Liberation Sans"/>
+              </a:rPr>
+              <a:t>Evaluation</a:t>
+            </a:r>
+          </a:p>
+          <a:p>
+            <a:pPr algn="ctr">
+              <a:spcBef>
+                <a:spcPts val="0"/>
+              </a:spcBef>
+              <a:spcAft>
+                <a:spcPts val="400"/>
+              </a:spcAft>
+            </a:pPr>
+            <a:r>
+              <a:rPr sz="1900" b="0">
+                <a:solidFill>
+                  <a:srgbClr val="536B82"/>
+                </a:solidFill>
+                <a:latin typeface="Liberation Sans"/>
+              </a:rPr>
+              <a:t>Validation: HR@10</a:t>
+            </a:r>
+          </a:p>
+          <a:p>
+            <a:pPr algn="ctr">
+              <a:spcBef>
+                <a:spcPts val="0"/>
+              </a:spcBef>
+              <a:spcAft>
+                <a:spcPts val="0"/>
+              </a:spcAft>
+            </a:pPr>
+            <a:r>
+              <a:rPr sz="1900" b="0">
+                <a:solidFill>
+                  <a:srgbClr val="536B82"/>
+                </a:solidFill>
+                <a:latin typeface="Liberation Sans"/>
+              </a:rPr>
+              <a:t>Test: NDCG / HR</a:t>
+            </a:r>
+          </a:p>
+        </p:txBody>
+      </p:sp>
+      <p:sp>
+        <p:nvSpPr>
+          <p:cNvPr id="98" name="Aggregation choices"/>
+          <p:cNvSpPr txBox="1"/>
+          <p:nvPr/>
+        </p:nvSpPr>
+        <p:spPr>
+          <a:xfrm>
+            <a:off x="548640" y="11137392"/>
+            <a:ext cx="20848320" cy="457200"/>
+          </a:xfrm>
+          <a:prstGeom prst="rect">
+            <a:avLst/>
+          </a:prstGeom>
+          <a:noFill/>
+        </p:spPr>
+        <p:txBody>
+          <a:bodyPr wrap="none" lIns="22860" rIns="22860" tIns="0" bIns="0" anchor="ctr">
+            <a:noAutofit/>
+          </a:bodyPr>
+          <a:lstStyle/>
           <a:p>
             <a:pPr algn="l">
               <a:spcBef>
@@ -6949,138 +7533,20 @@
               </a:spcAft>
             </a:pPr>
             <a:r>
-              <a:rPr sz="2000" b="0">
-                <a:solidFill>
-                  <a:srgbClr val="183450"/>
-                </a:solidFill>
-                <a:latin typeface="Liberation Sans"/>
-              </a:rPr>
-              <a:t>• Desc_Gemini_Meta</a:t>
-            </a:r>
-          </a:p>
-        </p:txBody>
-      </p:sp>
-      <p:sp>
-        <p:nvSpPr>
-          <p:cNvPr id="96" name="Graph path arms"/>
-          <p:cNvSpPr txBox="1"/>
-          <p:nvPr/>
-        </p:nvSpPr>
-        <p:spPr>
-          <a:xfrm>
-            <a:off x="17236440" y="8092440"/>
-            <a:ext cx="3474720" cy="2377440"/>
-          </a:xfrm>
-          <a:prstGeom prst="rect">
-            <a:avLst/>
-          </a:prstGeom>
-          <a:noFill/>
-        </p:spPr>
-        <p:txBody>
-          <a:bodyPr wrap="none" lIns="22860" rIns="22860" tIns="0" bIns="0" anchor="ctr">
-            <a:noAutofit/>
-          </a:bodyPr>
-          <a:lstStyle/>
-          <a:p>
-            <a:pPr algn="l">
-              <a:spcBef>
-                <a:spcPts val="0"/>
-              </a:spcBef>
-              <a:spcAft>
-                <a:spcPts val="400"/>
-              </a:spcAft>
-            </a:pPr>
-            <a:r>
-              <a:rPr sz="2200" b="1">
+              <a:rPr sz="1900" b="0">
                 <a:solidFill>
                   <a:srgbClr val="00898D"/>
                 </a:solidFill>
                 <a:latin typeface="Liberation Sans"/>
               </a:rPr>
-              <a:t>Graph Path</a:t>
-            </a:r>
-          </a:p>
-          <a:p>
-            <a:pPr algn="l">
-              <a:spcBef>
-                <a:spcPts val="0"/>
-              </a:spcBef>
-              <a:spcAft>
-                <a:spcPts val="400"/>
-              </a:spcAft>
-            </a:pPr>
-            <a:r>
-              <a:rPr sz="2000" b="0">
-                <a:solidFill>
-                  <a:srgbClr val="183450"/>
-                </a:solidFill>
-                <a:latin typeface="Liberation Sans"/>
-              </a:rPr>
-              <a:t>• Meta</a:t>
-            </a:r>
-          </a:p>
-          <a:p>
-            <a:pPr algn="l">
-              <a:spcBef>
-                <a:spcPts val="0"/>
-              </a:spcBef>
-              <a:spcAft>
-                <a:spcPts val="400"/>
-              </a:spcAft>
-            </a:pPr>
-            <a:r>
-              <a:rPr sz="2000" b="0">
-                <a:solidFill>
-                  <a:srgbClr val="183450"/>
-                </a:solidFill>
-                <a:latin typeface="Liberation Sans"/>
-              </a:rPr>
-              <a:t>• Graph_Qwen</a:t>
-            </a:r>
-          </a:p>
-          <a:p>
-            <a:pPr algn="l">
-              <a:spcBef>
-                <a:spcPts val="0"/>
-              </a:spcBef>
-              <a:spcAft>
-                <a:spcPts val="400"/>
-              </a:spcAft>
-            </a:pPr>
-            <a:r>
-              <a:rPr sz="2000" b="0">
-                <a:solidFill>
-                  <a:srgbClr val="183450"/>
-                </a:solidFill>
-                <a:latin typeface="Liberation Sans"/>
-              </a:rPr>
-              <a:t>• Graph_Qwen_Meta</a:t>
-            </a:r>
-          </a:p>
-          <a:p>
-            <a:pPr algn="l">
-              <a:spcBef>
-                <a:spcPts val="0"/>
-              </a:spcBef>
-              <a:spcAft>
-                <a:spcPts val="0"/>
-              </a:spcAft>
-            </a:pPr>
-            <a:r>
-              <a:rPr sz="2000" b="0">
-                <a:solidFill>
-                  <a:srgbClr val="183450"/>
-                </a:solidFill>
-                <a:latin typeface="Liberation Sans"/>
-              </a:rPr>
-              <a:t>• Graph_Gemini_Meta</a:t>
+              <a:t>Graph aggregation: mean · gnn · attn_pool · gnn_attn · transformer · transformer_pos · transformer_local</a:t>
             </a:r>
           </a:p>
         </p:txBody>
       </p:sp>
       <p:cxnSp>
         <p:nvCxnSpPr>
-          <p:cNvPr id="97" name="Item vectors to recommendation segment 1"/>
+          <p:cNvPr id="99" name="Item vectors to recommendation segment 1"/>
           <p:cNvCxnSpPr/>
           <p:nvPr/>
         </p:nvCxnSpPr>
@@ -7440,4 +7906,324 @@
   </a:objectDefaults>
   <a:extraClrSchemeLst/>
 </a:theme>
+</file>
+
+<file path=ppt/theme/theme2.xml><?xml version="1.0" encoding="utf-8"?>
+<a:theme xmlns:a="http://schemas.openxmlformats.org/drawingml/2006/main" name="Office Theme">
+  <a:themeElements>
+    <a:clrScheme name="Office">
+      <a:dk1>
+        <a:sysClr val="windowText" lastClr="000000"/>
+      </a:dk1>
+      <a:lt1>
+        <a:sysClr val="window" lastClr="FFFFFF"/>
+      </a:lt1>
+      <a:dk2>
+        <a:srgbClr val="1F497D"/>
+      </a:dk2>
+      <a:lt2>
+        <a:srgbClr val="EEECE1"/>
+      </a:lt2>
+      <a:accent1>
+        <a:srgbClr val="4F81BD"/>
+      </a:accent1>
+      <a:accent2>
+        <a:srgbClr val="C0504D"/>
+      </a:accent2>
+      <a:accent3>
+        <a:srgbClr val="9BBB59"/>
+      </a:accent3>
+      <a:accent4>
+        <a:srgbClr val="8064A2"/>
+      </a:accent4>
+      <a:accent5>
+        <a:srgbClr val="4BACC6"/>
+      </a:accent5>
+      <a:accent6>
+        <a:srgbClr val="F79646"/>
+      </a:accent6>
+      <a:hlink>
+        <a:srgbClr val="0000FF"/>
+      </a:hlink>
+      <a:folHlink>
+        <a:srgbClr val="800080"/>
+      </a:folHlink>
+    </a:clrScheme>
+    <a:fontScheme name="Office">
+      <a:majorFont>
+        <a:latin typeface="Calibri"/>
+        <a:ea typeface=""/>
+        <a:cs typeface=""/>
+        <a:font script="Jpan" typeface="ＭＳ Ｐゴシック"/>
+        <a:font script="Hang" typeface="맑은 고딕"/>
+        <a:font script="Hans" typeface="宋体"/>
+        <a:font script="Hant" typeface="新細明體"/>
+        <a:font script="Arab" typeface="Times New Roman"/>
+        <a:font script="Hebr" typeface="Times New Roman"/>
+        <a:font script="Thai" typeface="Angsana New"/>
+        <a:font script="Ethi" typeface="Nyala"/>
+        <a:font script="Beng" typeface="Vrinda"/>
+        <a:font script="Gujr" typeface="Shruti"/>
+        <a:font script="Khmr" typeface="MoolBoran"/>
+        <a:font script="Knda" typeface="Tunga"/>
+        <a:font script="Guru" typeface="Raavi"/>
+        <a:font script="Cans" typeface="Euphemia"/>
+        <a:font script="Cher" typeface="Plantagenet Cherokee"/>
+        <a:font script="Yiii" typeface="Microsoft Yi Baiti"/>
+        <a:font script="Tibt" typeface="Microsoft Himalaya"/>
+        <a:font script="Thaa" typeface="MV Boli"/>
+        <a:font script="Deva" typeface="Mangal"/>
+        <a:font script="Telu" typeface="Gautami"/>
+        <a:font script="Taml" typeface="Latha"/>
+        <a:font script="Syrc" typeface="Estrangelo Edessa"/>
+        <a:font script="Orya" typeface="Kalinga"/>
+        <a:font script="Mlym" typeface="Kartika"/>
+        <a:font script="Laoo" typeface="DokChampa"/>
+        <a:font script="Sinh" typeface="Iskoola Pota"/>
+        <a:font script="Mong" typeface="Mongolian Baiti"/>
+        <a:font script="Viet" typeface="Times New Roman"/>
+        <a:font script="Uigh" typeface="Microsoft Uighur"/>
+        <a:font script="Geor" typeface="Sylfaen"/>
+      </a:majorFont>
+      <a:minorFont>
+        <a:latin typeface="Calibri"/>
+        <a:ea typeface=""/>
+        <a:cs typeface=""/>
+        <a:font script="Jpan" typeface="ＭＳ Ｐゴシック"/>
+        <a:font script="Hang" typeface="맑은 고딕"/>
+        <a:font script="Hans" typeface="宋体"/>
+        <a:font script="Hant" typeface="新細明體"/>
+        <a:font script="Arab" typeface="Arial"/>
+        <a:font script="Hebr" typeface="Arial"/>
+        <a:font script="Thai" typeface="Cordia New"/>
+        <a:font script="Ethi" typeface="Nyala"/>
+        <a:font script="Beng" typeface="Vrinda"/>
+        <a:font script="Gujr" typeface="Shruti"/>
+        <a:font script="Khmr" typeface="DaunPenh"/>
+        <a:font script="Knda" typeface="Tunga"/>
+        <a:font script="Guru" typeface="Raavi"/>
+        <a:font script="Cans" typeface="Euphemia"/>
+        <a:font script="Cher" typeface="Plantagenet Cherokee"/>
+        <a:font script="Yiii" typeface="Microsoft Yi Baiti"/>
+        <a:font script="Tibt" typeface="Microsoft Himalaya"/>
+        <a:font script="Thaa" typeface="MV Boli"/>
+        <a:font script="Deva" typeface="Mangal"/>
+        <a:font script="Telu" typeface="Gautami"/>
+        <a:font script="Taml" typeface="Latha"/>
+        <a:font script="Syrc" typeface="Estrangelo Edessa"/>
+        <a:font script="Orya" typeface="Kalinga"/>
+        <a:font script="Mlym" typeface="Kartika"/>
+        <a:font script="Laoo" typeface="DokChampa"/>
+        <a:font script="Sinh" typeface="Iskoola Pota"/>
+        <a:font script="Mong" typeface="Mongolian Baiti"/>
+        <a:font script="Viet" typeface="Arial"/>
+        <a:font script="Uigh" typeface="Microsoft Uighur"/>
+        <a:font script="Geor" typeface="Sylfaen"/>
+      </a:minorFont>
+    </a:fontScheme>
+    <a:fmtScheme name="Office">
+      <a:fillStyleLst>
+        <a:solidFill>
+          <a:schemeClr val="phClr"/>
+        </a:solidFill>
+        <a:gradFill rotWithShape="1">
+          <a:gsLst>
+            <a:gs pos="0">
+              <a:schemeClr val="phClr">
+                <a:tint val="50000"/>
+                <a:satMod val="300000"/>
+              </a:schemeClr>
+            </a:gs>
+            <a:gs pos="35000">
+              <a:schemeClr val="phClr">
+                <a:tint val="37000"/>
+                <a:satMod val="300000"/>
+              </a:schemeClr>
+            </a:gs>
+            <a:gs pos="100000">
+              <a:schemeClr val="phClr">
+                <a:tint val="15000"/>
+                <a:satMod val="350000"/>
+              </a:schemeClr>
+            </a:gs>
+          </a:gsLst>
+          <a:lin ang="16200000" scaled="1"/>
+        </a:gradFill>
+        <a:gradFill rotWithShape="1">
+          <a:gsLst>
+            <a:gs pos="0">
+              <a:schemeClr val="phClr">
+                <a:tint val="100000"/>
+                <a:shade val="100000"/>
+                <a:satMod val="130000"/>
+              </a:schemeClr>
+            </a:gs>
+            <a:gs pos="100000">
+              <a:schemeClr val="phClr">
+                <a:tint val="50000"/>
+                <a:shade val="100000"/>
+                <a:satMod val="350000"/>
+              </a:schemeClr>
+            </a:gs>
+          </a:gsLst>
+          <a:lin ang="16200000" scaled="0"/>
+        </a:gradFill>
+      </a:fillStyleLst>
+      <a:lnStyleLst>
+        <a:ln w="9525" cap="flat" cmpd="sng" algn="ctr">
+          <a:solidFill>
+            <a:schemeClr val="phClr">
+              <a:shade val="95000"/>
+              <a:satMod val="105000"/>
+            </a:schemeClr>
+          </a:solidFill>
+          <a:prstDash val="solid"/>
+        </a:ln>
+        <a:ln w="25400" cap="flat" cmpd="sng" algn="ctr">
+          <a:solidFill>
+            <a:schemeClr val="phClr"/>
+          </a:solidFill>
+          <a:prstDash val="solid"/>
+        </a:ln>
+        <a:ln w="38100" cap="flat" cmpd="sng" algn="ctr">
+          <a:solidFill>
+            <a:schemeClr val="phClr"/>
+          </a:solidFill>
+          <a:prstDash val="solid"/>
+        </a:ln>
+      </a:lnStyleLst>
+      <a:effectStyleLst>
+        <a:effectStyle>
+          <a:effectLst>
+            <a:outerShdw blurRad="40000" dist="20000" dir="5400000" rotWithShape="0">
+              <a:srgbClr val="000000">
+                <a:alpha val="38000"/>
+              </a:srgbClr>
+            </a:outerShdw>
+          </a:effectLst>
+        </a:effectStyle>
+        <a:effectStyle>
+          <a:effectLst>
+            <a:outerShdw blurRad="40000" dist="23000" dir="5400000" rotWithShape="0">
+              <a:srgbClr val="000000">
+                <a:alpha val="35000"/>
+              </a:srgbClr>
+            </a:outerShdw>
+          </a:effectLst>
+        </a:effectStyle>
+        <a:effectStyle>
+          <a:effectLst>
+            <a:outerShdw blurRad="40000" dist="23000" dir="5400000" rotWithShape="0">
+              <a:srgbClr val="000000">
+                <a:alpha val="35000"/>
+              </a:srgbClr>
+            </a:outerShdw>
+          </a:effectLst>
+          <a:scene3d>
+            <a:camera prst="orthographicFront">
+              <a:rot lat="0" lon="0" rev="0"/>
+            </a:camera>
+            <a:lightRig rig="threePt" dir="t">
+              <a:rot lat="0" lon="0" rev="1200000"/>
+            </a:lightRig>
+          </a:scene3d>
+          <a:sp3d>
+            <a:bevelT w="63500" h="25400"/>
+          </a:sp3d>
+        </a:effectStyle>
+      </a:effectStyleLst>
+      <a:bgFillStyleLst>
+        <a:solidFill>
+          <a:schemeClr val="phClr"/>
+        </a:solidFill>
+        <a:gradFill rotWithShape="1">
+          <a:gsLst>
+            <a:gs pos="0">
+              <a:schemeClr val="phClr">
+                <a:tint val="40000"/>
+                <a:satMod val="350000"/>
+              </a:schemeClr>
+            </a:gs>
+            <a:gs pos="40000">
+              <a:schemeClr val="phClr">
+                <a:tint val="45000"/>
+                <a:shade val="99000"/>
+                <a:satMod val="350000"/>
+              </a:schemeClr>
+            </a:gs>
+            <a:gs pos="100000">
+              <a:schemeClr val="phClr">
+                <a:shade val="20000"/>
+                <a:satMod val="255000"/>
+              </a:schemeClr>
+            </a:gs>
+          </a:gsLst>
+          <a:path path="circle">
+            <a:fillToRect l="50000" t="-80000" r="50000" b="180000"/>
+          </a:path>
+        </a:gradFill>
+        <a:gradFill rotWithShape="1">
+          <a:gsLst>
+            <a:gs pos="0">
+              <a:schemeClr val="phClr">
+                <a:tint val="80000"/>
+                <a:satMod val="300000"/>
+              </a:schemeClr>
+            </a:gs>
+            <a:gs pos="100000">
+              <a:schemeClr val="phClr">
+                <a:shade val="30000"/>
+                <a:satMod val="200000"/>
+              </a:schemeClr>
+            </a:gs>
+          </a:gsLst>
+          <a:path path="circle">
+            <a:fillToRect l="50000" t="50000" r="50000" b="50000"/>
+          </a:path>
+        </a:gradFill>
+      </a:bgFillStyleLst>
+    </a:fmtScheme>
+  </a:themeElements>
+  <a:objectDefaults>
+    <a:spDef>
+      <a:spPr/>
+      <a:bodyPr/>
+      <a:lstStyle/>
+      <a:style>
+        <a:lnRef idx="1">
+          <a:schemeClr val="accent1"/>
+        </a:lnRef>
+        <a:fillRef idx="3">
+          <a:schemeClr val="accent1"/>
+        </a:fillRef>
+        <a:effectRef idx="2">
+          <a:schemeClr val="accent1"/>
+        </a:effectRef>
+        <a:fontRef idx="minor">
+          <a:schemeClr val="lt1"/>
+        </a:fontRef>
+      </a:style>
+    </a:spDef>
+    <a:lnDef>
+      <a:spPr/>
+      <a:bodyPr/>
+      <a:lstStyle/>
+      <a:style>
+        <a:lnRef idx="2">
+          <a:schemeClr val="accent1"/>
+        </a:lnRef>
+        <a:fillRef idx="0">
+          <a:schemeClr val="accent1"/>
+        </a:fillRef>
+        <a:effectRef idx="1">
+          <a:schemeClr val="accent1"/>
+        </a:effectRef>
+        <a:fontRef idx="minor">
+          <a:schemeClr val="tx1"/>
+        </a:fontRef>
+      </a:style>
+    </a:lnDef>
+  </a:objectDefaults>
+  <a:extraClrSchemeLst/>
+</a:theme>
 </file>